--- a/Bridge_Presentation.pptx
+++ b/Bridge_Presentation.pptx
@@ -32418,7 +32418,7 @@
                 <a:sym typeface="Calibri"/>
                 <a:hlinkClick r:id="rId4"/>
               </a:rPr>
-              <a:t>Link Here</a:t>
+              <a:t>QR code expired</a:t>
             </a:r>
             <a:endParaRPr b="0" i="0" sz="1400" u="none" cap="none" strike="noStrike">
               <a:solidFill>
